--- a/docs/mtg/20261013_研究室MTG.pptx
+++ b/docs/mtg/20261013_研究室MTG.pptx
@@ -11,6 +11,7 @@
     <p:sldId id="283" r:id="rId2"/>
     <p:sldId id="305" r:id="rId3"/>
     <p:sldId id="258" r:id="rId4"/>
+    <p:sldId id="306" r:id="rId15"/>
   </p:sldIdLst>
   <p:sldSz cx="12192000" cy="6858000"/>
   <p:notesSz cx="7104063" cy="10234613"/>
@@ -1892,7 +1893,7 @@
           <a:p>
             <a:r>
               <a:rPr kumimoji="1" lang="ja-JP" altLang="en-US" sz="1400" dirty="0"/>
-              <a:t>【1枚目／50秒】実施内容</a:t>
+              <a:t>【1枚目／40秒】実施内容</a:t>
             </a:r>
           </a:p>
           <a:p>
@@ -1904,19 +1905,19 @@
           <a:p>
             <a:r>
               <a:rPr kumimoji="1" lang="ja-JP" altLang="en-US" sz="1400" dirty="0"/>
-              <a:t>1つ目は、保護者用の説明と同意書です。研究の内容、記録するもの、いつでもやめられることを1枚にまとめました。</a:t>
+              <a:t>1つ目は保護者用の説明と同意書で、研究の内容、記録するもの、いつでもやめられることを1枚にまとめました。</a:t>
             </a:r>
           </a:p>
           <a:p>
             <a:r>
               <a:rPr kumimoji="1" lang="ja-JP" altLang="en-US" sz="1400" dirty="0"/>
-              <a:t>2つ目は、生徒用の説明と同意書です。中学生でも読めるように文を短くして、むずかしい言葉にはふりがなをつけました。</a:t>
+              <a:t>2つ目は生徒用の説明と同意書で、文を短くして、むずかしい言葉にはふりがなをつけました。</a:t>
             </a:r>
           </a:p>
           <a:p>
             <a:r>
               <a:rPr kumimoji="1" lang="ja-JP" altLang="en-US" sz="1400" dirty="0"/>
-              <a:t>3つ目は、使い終わったあとのアンケートです。4段階で答える15問と、自由に書く3問で、名前は書かない形にしました。</a:t>
+              <a:t>3つ目は使用後のアンケートで、4段階の15問と自由記述の3問です。名前は書きません。</a:t>
             </a:r>
           </a:p>
         </p:txBody>
@@ -2009,31 +2010,119 @@
           <a:p>
             <a:r>
               <a:rPr kumimoji="1" lang="ja-JP" altLang="en-US" sz="1400" dirty="0"/>
-              <a:t>【2枚目／30秒】相談したいこと</a:t>
+              <a:t>【2枚目／20秒】相談したいこと</a:t>
             </a:r>
           </a:p>
           <a:p>
             <a:r>
               <a:rPr kumimoji="1" lang="ja-JP" altLang="en-US" sz="1400" dirty="0"/>
-              <a:t>1つ相談があります。</a:t>
+              <a:t>1つ相談です。同意書の問い合わせ先がまだ決まっていません。</a:t>
             </a:r>
           </a:p>
           <a:p>
             <a:r>
               <a:rPr kumimoji="1" lang="ja-JP" altLang="en-US" sz="1400" dirty="0"/>
-              <a:t>同意書の「問い合わせ先」を、まだ決められていません。</a:t>
-            </a:r>
-          </a:p>
+              <a:t>候補は金道先生、SP-PSのメンバー、ろう学校の3つです。誰にするのがよいか、ご意見をください。</a:t>
+            </a:r>
+          </a:p>
+        </p:txBody>
+      </p:sp>
+      <p:sp>
+        <p:nvSpPr>
+          <p:cNvPr id="4" name="スライド番号プレースホルダー 3"/>
+          <p:cNvSpPr>
+            <a:spLocks noGrp="1"/>
+          </p:cNvSpPr>
+          <p:nvPr>
+            <p:ph type="sldNum" sz="quarter" idx="10"/>
+          </p:nvPr>
+        </p:nvSpPr>
+        <p:spPr/>
+        <p:txBody>
+          <a:bodyPr/>
+          <a:lstStyle/>
+          <a:p>
+            <a:fld id="{7A9E1E52-1B0C-4B1E-9D0F-2C3A4B5C6D7E}" type="slidenum">
+              <a:rPr kumimoji="1" lang="ja-JP" altLang="en-US" smtClean="0"/>
+              <a:t>2</a:t>
+            </a:fld>
+            <a:endParaRPr kumimoji="1" lang="ja-JP" altLang="en-US"/>
+          </a:p>
+        </p:txBody>
+      </p:sp>
+    </p:spTree>
+  </p:cSld>
+  <p:clrMapOvr>
+    <a:masterClrMapping/>
+  </p:clrMapOvr>
+</p:notes>
+</file>
+
+<file path=ppt/notesSlides/notesSlide3.xml><?xml version="1.0" encoding="utf-8"?>
+<p:notes xmlns:a="http://schemas.openxmlformats.org/drawingml/2006/main" xmlns:r="http://schemas.openxmlformats.org/officeDocument/2006/relationships" xmlns:p="http://schemas.openxmlformats.org/presentationml/2006/main">
+  <p:cSld>
+    <p:spTree>
+      <p:nvGrpSpPr>
+        <p:cNvPr id="1" name=""/>
+        <p:cNvGrpSpPr/>
+        <p:nvPr/>
+      </p:nvGrpSpPr>
+      <p:grpSpPr>
+        <a:xfrm>
+          <a:off x="0" y="0"/>
+          <a:ext cx="0" cy="0"/>
+          <a:chOff x="0" y="0"/>
+          <a:chExt cx="0" cy="0"/>
+        </a:xfrm>
+      </p:grpSpPr>
+      <p:sp>
+        <p:nvSpPr>
+          <p:cNvPr id="2" name="スライド イメージ プレースホルダー 1"/>
+          <p:cNvSpPr>
+            <a:spLocks noGrp="1" noRot="1" noChangeAspect="1"/>
+          </p:cNvSpPr>
+          <p:nvPr>
+            <p:ph type="sldImg"/>
+          </p:nvPr>
+        </p:nvSpPr>
+        <p:spPr/>
+      </p:sp>
+      <p:sp>
+        <p:nvSpPr>
+          <p:cNvPr id="3" name="ノート プレースホルダー 2"/>
+          <p:cNvSpPr>
+            <a:spLocks noGrp="1"/>
+          </p:cNvSpPr>
+          <p:nvPr>
+            <p:ph type="body" idx="1"/>
+          </p:nvPr>
+        </p:nvSpPr>
+        <p:spPr/>
+        <p:txBody>
+          <a:bodyPr/>
+          <a:lstStyle/>
           <a:p>
             <a:r>
               <a:rPr kumimoji="1" lang="ja-JP" altLang="en-US" sz="1400" dirty="0"/>
-              <a:t>候補は、金道先生、SP-PSのメンバー、ろう学校の3つです。</a:t>
+              <a:t>【3枚目／20秒】来週以降にやること</a:t>
             </a:r>
           </a:p>
           <a:p>
             <a:r>
               <a:rPr kumimoji="1" lang="ja-JP" altLang="en-US" sz="1400" dirty="0"/>
-              <a:t>保護者や生徒が困ったときに、まず誰に連絡するのがよいか、ご意見をいただきたいです。以上です。</a:t>
+              <a:t>来週は、生徒がひとりでアプリを使えるように、手順書を作ります。</a:t>
+            </a:r>
+          </a:p>
+          <a:p>
+            <a:r>
+              <a:rPr kumimoji="1" lang="ja-JP" altLang="en-US" sz="1400" dirty="0"/>
+              <a:t>対象はろう学校の中学部・高等部の生徒で、録音から結果の見方までを、画面の画像つきで説明します。</a:t>
+            </a:r>
+          </a:p>
+          <a:p>
+            <a:r>
+              <a:rPr kumimoji="1" lang="ja-JP" altLang="en-US" sz="1400" dirty="0"/>
+              <a:t>音が聞こえなくても分かるように、図を中心にします。以上です。</a:t>
             </a:r>
           </a:p>
         </p:txBody>
@@ -4798,6 +4887,552 @@
               </a:rPr>
               <a:t>誰を問い合わせ先にすべきか、ご意見をください</a:t>
             </a:r>
+          </a:p>
+        </p:txBody>
+      </p:sp>
+    </p:spTree>
+  </p:cSld>
+  <p:clrMapOvr>
+    <a:masterClrMapping/>
+  </p:clrMapOvr>
+</p:sld>
+</file>
+
+<file path=ppt/slides/slide4.xml><?xml version="1.0" encoding="utf-8"?>
+<p:sld xmlns:a="http://schemas.openxmlformats.org/drawingml/2006/main" xmlns:r="http://schemas.openxmlformats.org/officeDocument/2006/relationships" xmlns:p="http://schemas.openxmlformats.org/presentationml/2006/main">
+  <p:cSld>
+    <p:spTree>
+      <p:nvGrpSpPr>
+        <p:cNvPr id="1" name=""/>
+        <p:cNvGrpSpPr/>
+        <p:nvPr/>
+      </p:nvGrpSpPr>
+      <p:grpSpPr>
+        <a:xfrm>
+          <a:off x="0" y="0"/>
+          <a:ext cx="0" cy="0"/>
+          <a:chOff x="0" y="0"/>
+          <a:chExt cx="0" cy="0"/>
+        </a:xfrm>
+      </p:grpSpPr>
+      <p:sp>
+        <p:nvSpPr>
+          <p:cNvPr id="1101" name="図形 1101"/>
+          <p:cNvSpPr/>
+          <p:nvPr/>
+        </p:nvSpPr>
+        <p:spPr>
+          <a:xfrm>
+            <a:off x="219456" y="274320"/>
+            <a:ext cx="96012" cy="457200"/>
+          </a:xfrm>
+          <a:prstGeom prst="rect">
+            <a:avLst/>
+          </a:prstGeom>
+          <a:solidFill>
+            <a:srgbClr val="203864"/>
+          </a:solidFill>
+          <a:ln>
+            <a:noFill/>
+          </a:ln>
+        </p:spPr>
+        <p:txBody>
+          <a:bodyPr wrap="square" lIns="109728" tIns="45720" rIns="109728" bIns="45720" rtlCol="0" anchor="ctr">
+            <a:noAutofit/>
+          </a:bodyPr>
+          <a:lstStyle/>
+          <a:p>
+            <a:pPr algn="ctr"/>
+            <a:endParaRPr lang="ja-JP"/>
+          </a:p>
+        </p:txBody>
+      </p:sp>
+      <p:sp>
+        <p:nvSpPr>
+          <p:cNvPr id="1102" name="テキスト ボックス 1102"/>
+          <p:cNvSpPr txBox="1"/>
+          <p:nvPr/>
+        </p:nvSpPr>
+        <p:spPr>
+          <a:xfrm>
+            <a:off x="502920" y="83439"/>
+            <a:ext cx="9555480" cy="841248"/>
+          </a:xfrm>
+          <a:prstGeom prst="rect">
+            <a:avLst/>
+          </a:prstGeom>
+          <a:noFill/>
+        </p:spPr>
+        <p:txBody>
+          <a:bodyPr wrap="square" lIns="0" tIns="0" rIns="0" bIns="0" rtlCol="0" anchor="ctr">
+            <a:noAutofit/>
+          </a:bodyPr>
+          <a:lstStyle/>
+          <a:p>
+            <a:pPr algn="l">
+              <a:lnSpc>
+                <a:spcPct val="100000"/>
+              </a:lnSpc>
+              <a:buNone/>
+            </a:pPr>
+            <a:r>
+              <a:rPr kumimoji="1" lang="ja-JP" altLang="en-US" sz="3000" b="1" dirty="0">
+                <a:solidFill>
+                  <a:srgbClr val="203864"/>
+                </a:solidFill>
+                <a:latin typeface="MS PGothic"/>
+                <a:ea typeface="MS PGothic"/>
+              </a:rPr>
+              <a:t>来週以降にやること</a:t>
+            </a:r>
+          </a:p>
+        </p:txBody>
+      </p:sp>
+      <p:sp>
+        <p:nvSpPr>
+          <p:cNvPr id="1103" name="スライド番号プレースホルダー 1103"/>
+          <p:cNvSpPr>
+            <a:spLocks noGrp="1"/>
+          </p:cNvSpPr>
+          <p:nvPr>
+            <p:ph type="sldNum" sz="quarter" idx="12"/>
+          </p:nvPr>
+        </p:nvSpPr>
+        <p:spPr/>
+        <p:txBody>
+          <a:bodyPr/>
+          <a:lstStyle/>
+          <a:p>
+            <a:fld id="{3E6C071F-0D9C-4209-B1B5-FDE6B10623E0}" type="slidenum">
+              <a:rPr kumimoji="1" lang="ja-JP" altLang="en-US" smtClean="0"/>
+              <a:t>4</a:t>
+            </a:fld>
+            <a:endParaRPr kumimoji="1" lang="ja-JP" altLang="en-US"/>
+          </a:p>
+        </p:txBody>
+      </p:sp>
+      <p:sp>
+        <p:nvSpPr>
+          <p:cNvPr id="1104" name="図形 1104"/>
+          <p:cNvSpPr/>
+          <p:nvPr/>
+        </p:nvSpPr>
+        <p:spPr>
+          <a:xfrm>
+            <a:off x="502920" y="1684020"/>
+            <a:ext cx="11183112" cy="1060704"/>
+          </a:xfrm>
+          <a:prstGeom prst="rect">
+            <a:avLst/>
+          </a:prstGeom>
+          <a:solidFill>
+            <a:srgbClr val="F3F4F6"/>
+          </a:solidFill>
+          <a:ln>
+            <a:noFill/>
+          </a:ln>
+        </p:spPr>
+        <p:txBody>
+          <a:bodyPr wrap="square" lIns="109728" tIns="45720" rIns="109728" bIns="45720" rtlCol="0" anchor="ctr">
+            <a:noAutofit/>
+          </a:bodyPr>
+          <a:lstStyle/>
+          <a:p>
+            <a:pPr algn="ctr"/>
+            <a:endParaRPr lang="ja-JP"/>
+          </a:p>
+        </p:txBody>
+      </p:sp>
+      <p:sp>
+        <p:nvSpPr>
+          <p:cNvPr id="1105" name="図形 1105"/>
+          <p:cNvSpPr/>
+          <p:nvPr/>
+        </p:nvSpPr>
+        <p:spPr>
+          <a:xfrm>
+            <a:off x="502920" y="1684020"/>
+            <a:ext cx="96012" cy="1060704"/>
+          </a:xfrm>
+          <a:prstGeom prst="rect">
+            <a:avLst/>
+          </a:prstGeom>
+          <a:solidFill>
+            <a:srgbClr val="203864"/>
+          </a:solidFill>
+          <a:ln>
+            <a:noFill/>
+          </a:ln>
+        </p:spPr>
+        <p:txBody>
+          <a:bodyPr wrap="square" lIns="109728" tIns="45720" rIns="109728" bIns="45720" rtlCol="0" anchor="ctr">
+            <a:noAutofit/>
+          </a:bodyPr>
+          <a:lstStyle/>
+          <a:p>
+            <a:pPr algn="ctr"/>
+            <a:endParaRPr lang="ja-JP"/>
+          </a:p>
+        </p:txBody>
+      </p:sp>
+      <p:sp>
+        <p:nvSpPr>
+          <p:cNvPr id="1106" name="テキスト ボックス 1106"/>
+          <p:cNvSpPr txBox="1"/>
+          <p:nvPr/>
+        </p:nvSpPr>
+        <p:spPr>
+          <a:xfrm>
+            <a:off x="841248" y="1684020"/>
+            <a:ext cx="10661904" cy="1060704"/>
+          </a:xfrm>
+          <a:prstGeom prst="rect">
+            <a:avLst/>
+          </a:prstGeom>
+          <a:noFill/>
+        </p:spPr>
+        <p:txBody>
+          <a:bodyPr wrap="square" lIns="0" tIns="0" rIns="0" bIns="0" rtlCol="0" anchor="ctr">
+            <a:noAutofit/>
+          </a:bodyPr>
+          <a:lstStyle/>
+          <a:p>
+            <a:pPr algn="l">
+              <a:lnSpc>
+                <a:spcPct val="118000"/>
+              </a:lnSpc>
+              <a:buNone/>
+            </a:pPr>
+            <a:r>
+              <a:rPr kumimoji="1" lang="ja-JP" altLang="en-US" sz="3100" b="1" dirty="0">
+                <a:solidFill>
+                  <a:srgbClr val="203864"/>
+                </a:solidFill>
+                <a:latin typeface="MS PGothic"/>
+                <a:ea typeface="MS PGothic"/>
+              </a:rPr>
+              <a:t>生徒がひとりで使えるように、手順書を作る</a:t>
+            </a:r>
+          </a:p>
+        </p:txBody>
+      </p:sp>
+      <p:sp>
+        <p:nvSpPr>
+          <p:cNvPr id="1111" name="図形 1111"/>
+          <p:cNvSpPr/>
+          <p:nvPr/>
+        </p:nvSpPr>
+        <p:spPr>
+          <a:xfrm>
+            <a:off x="502920" y="3221355"/>
+            <a:ext cx="4114800" cy="731520"/>
+          </a:xfrm>
+          <a:prstGeom prst="roundRect">
+            <a:avLst>
+              <a:gd name="adj" fmla="val 17500"/>
+            </a:avLst>
+          </a:prstGeom>
+          <a:solidFill>
+            <a:srgbClr val="203864"/>
+          </a:solidFill>
+          <a:ln>
+            <a:noFill/>
+          </a:ln>
+        </p:spPr>
+        <p:txBody>
+          <a:bodyPr wrap="square" lIns="109728" tIns="45720" rIns="109728" bIns="45720" rtlCol="0" anchor="ctr">
+            <a:noAutofit/>
+          </a:bodyPr>
+          <a:lstStyle/>
+          <a:p>
+            <a:pPr algn="ctr">
+              <a:buNone/>
+            </a:pPr>
+            <a:r>
+              <a:rPr kumimoji="1" lang="ja-JP" altLang="en-US" sz="2400" b="1" dirty="0">
+                <a:solidFill>
+                  <a:srgbClr val="FFFFFF"/>
+                </a:solidFill>
+                <a:latin typeface="MS PGothic"/>
+                <a:ea typeface="MS PGothic"/>
+              </a:rPr>
+              <a:t>対象</a:t>
+            </a:r>
+          </a:p>
+        </p:txBody>
+      </p:sp>
+      <p:sp>
+        <p:nvSpPr>
+          <p:cNvPr id="1112" name="テキスト ボックス 1112"/>
+          <p:cNvSpPr txBox="1"/>
+          <p:nvPr/>
+        </p:nvSpPr>
+        <p:spPr>
+          <a:xfrm>
+            <a:off x="4983480" y="3221355"/>
+            <a:ext cx="6702552" cy="731520"/>
+          </a:xfrm>
+          <a:prstGeom prst="rect">
+            <a:avLst/>
+          </a:prstGeom>
+          <a:noFill/>
+        </p:spPr>
+        <p:txBody>
+          <a:bodyPr wrap="square" lIns="0" tIns="0" rIns="0" bIns="0" rtlCol="0" anchor="ctr">
+            <a:noAutofit/>
+          </a:bodyPr>
+          <a:lstStyle/>
+          <a:p>
+            <a:pPr algn="l">
+              <a:lnSpc>
+                <a:spcPct val="118000"/>
+              </a:lnSpc>
+              <a:buNone/>
+            </a:pPr>
+            <a:r>
+              <a:rPr kumimoji="1" lang="ja-JP" altLang="en-US" sz="2800" dirty="0">
+                <a:solidFill>
+                  <a:srgbClr val="17253C"/>
+                </a:solidFill>
+                <a:latin typeface="MS PGothic"/>
+                <a:ea typeface="MS PGothic"/>
+              </a:rPr>
+              <a:t>ろう学校の中学部・高等部の生徒</a:t>
+            </a:r>
+            <a:endParaRPr lang="ja-JP" altLang="en-US" sz="2800" dirty="0">
+              <a:solidFill>
+                <a:srgbClr val="17253C"/>
+              </a:solidFill>
+              <a:latin typeface="MS PGothic"/>
+              <a:ea typeface="MS PGothic"/>
+            </a:endParaRPr>
+          </a:p>
+        </p:txBody>
+      </p:sp>
+      <p:sp>
+        <p:nvSpPr>
+          <p:cNvPr id="1113" name="図形 1113"/>
+          <p:cNvSpPr/>
+          <p:nvPr/>
+        </p:nvSpPr>
+        <p:spPr>
+          <a:xfrm>
+            <a:off x="502920" y="4301490"/>
+            <a:ext cx="4114800" cy="731520"/>
+          </a:xfrm>
+          <a:prstGeom prst="roundRect">
+            <a:avLst>
+              <a:gd name="adj" fmla="val 17500"/>
+            </a:avLst>
+          </a:prstGeom>
+          <a:solidFill>
+            <a:srgbClr val="203864"/>
+          </a:solidFill>
+          <a:ln>
+            <a:noFill/>
+          </a:ln>
+        </p:spPr>
+        <p:txBody>
+          <a:bodyPr wrap="square" lIns="109728" tIns="45720" rIns="109728" bIns="45720" rtlCol="0" anchor="ctr">
+            <a:noAutofit/>
+          </a:bodyPr>
+          <a:lstStyle/>
+          <a:p>
+            <a:pPr algn="ctr">
+              <a:buNone/>
+            </a:pPr>
+            <a:r>
+              <a:rPr kumimoji="1" lang="ja-JP" altLang="en-US" sz="2400" b="1" dirty="0">
+                <a:solidFill>
+                  <a:srgbClr val="FFFFFF"/>
+                </a:solidFill>
+                <a:latin typeface="MS PGothic"/>
+                <a:ea typeface="MS PGothic"/>
+              </a:rPr>
+              <a:t>中身</a:t>
+            </a:r>
+            <a:r>
+              <a:rPr lang="ja-JP" altLang="en-US" sz="2400" b="1">
+                <a:solidFill>
+                  <a:srgbClr val="FFFFFF"/>
+                </a:solidFill>
+                <a:latin typeface="MS PGothic"/>
+                <a:ea typeface="MS PGothic"/>
+              </a:rPr>
+              <a:t/>
+            </a:r>
+            <a:endParaRPr kumimoji="1" lang="ja-JP" altLang="en-US" sz="2400" b="1" dirty="0">
+              <a:solidFill>
+                <a:srgbClr val="FFFFFF"/>
+              </a:solidFill>
+              <a:latin typeface="MS PGothic"/>
+              <a:ea typeface="MS PGothic"/>
+            </a:endParaRPr>
+          </a:p>
+        </p:txBody>
+      </p:sp>
+      <p:sp>
+        <p:nvSpPr>
+          <p:cNvPr id="1114" name="テキスト ボックス 1114"/>
+          <p:cNvSpPr txBox="1"/>
+          <p:nvPr/>
+        </p:nvSpPr>
+        <p:spPr>
+          <a:xfrm>
+            <a:off x="4983480" y="4301490"/>
+            <a:ext cx="6702552" cy="731520"/>
+          </a:xfrm>
+          <a:prstGeom prst="rect">
+            <a:avLst/>
+          </a:prstGeom>
+          <a:noFill/>
+        </p:spPr>
+        <p:txBody>
+          <a:bodyPr wrap="square" lIns="0" tIns="0" rIns="0" bIns="0" rtlCol="0" anchor="ctr">
+            <a:noAutofit/>
+          </a:bodyPr>
+          <a:lstStyle/>
+          <a:p>
+            <a:r>
+              <a:rPr lang="ja-JP" sz="2800">
+                <a:solidFill>
+                  <a:srgbClr val="17253C"/>
+                </a:solidFill>
+                <a:latin typeface="MS PGothic"/>
+                <a:ea typeface="MS PGothic"/>
+              </a:rPr>
+              <a:t>録音から結果の見方まで、画面つき</a:t>
+            </a:r>
+            <a:r>
+              <a:rPr kumimoji="1" lang="ja-JP" sz="2800">
+                <a:solidFill>
+                  <a:srgbClr val="17253C"/>
+                </a:solidFill>
+                <a:latin typeface="MS PGothic"/>
+                <a:ea typeface="MS PGothic"/>
+              </a:rPr>
+              <a:t/>
+            </a:r>
+            <a:r>
+              <a:rPr lang="ja-JP" sz="2800">
+                <a:solidFill>
+                  <a:srgbClr val="17253C"/>
+                </a:solidFill>
+                <a:latin typeface="MS PGothic"/>
+                <a:ea typeface="MS PGothic"/>
+              </a:rPr>
+              <a:t/>
+            </a:r>
+            <a:r>
+              <a:rPr kumimoji="1" lang="ja-JP" sz="2800">
+                <a:solidFill>
+                  <a:srgbClr val="17253C"/>
+                </a:solidFill>
+                <a:latin typeface="MS PGothic"/>
+                <a:ea typeface="MS PGothic"/>
+              </a:rPr>
+              <a:t/>
+            </a:r>
+            <a:endParaRPr lang="ja-JP" sz="2800">
+              <a:solidFill>
+                <a:srgbClr val="000000"/>
+              </a:solidFill>
+              <a:latin typeface="MS PGothic"/>
+              <a:ea typeface="MS PGothic"/>
+            </a:endParaRPr>
+          </a:p>
+        </p:txBody>
+      </p:sp>
+      <p:sp>
+        <p:nvSpPr>
+          <p:cNvPr id="1115" name="図形 1115"/>
+          <p:cNvSpPr/>
+          <p:nvPr/>
+        </p:nvSpPr>
+        <p:spPr>
+          <a:xfrm>
+            <a:off x="493395" y="5343525"/>
+            <a:ext cx="4114800" cy="731520"/>
+          </a:xfrm>
+          <a:prstGeom prst="roundRect">
+            <a:avLst>
+              <a:gd name="adj" fmla="val 17500"/>
+            </a:avLst>
+          </a:prstGeom>
+          <a:solidFill>
+            <a:srgbClr val="203864"/>
+          </a:solidFill>
+          <a:ln>
+            <a:noFill/>
+          </a:ln>
+        </p:spPr>
+        <p:txBody>
+          <a:bodyPr wrap="square" lIns="109728" tIns="45720" rIns="109728" bIns="45720" rtlCol="0" anchor="ctr">
+            <a:noAutofit/>
+          </a:bodyPr>
+          <a:lstStyle/>
+          <a:p>
+            <a:pPr algn="ctr">
+              <a:buNone/>
+            </a:pPr>
+            <a:r>
+              <a:rPr kumimoji="1" lang="ja-JP" altLang="en-US" sz="2400" b="1" dirty="0">
+                <a:solidFill>
+                  <a:srgbClr val="FFFFFF"/>
+                </a:solidFill>
+                <a:latin typeface="MS PGothic"/>
+                <a:ea typeface="MS PGothic"/>
+              </a:rPr>
+              <a:t>工夫</a:t>
+            </a:r>
+          </a:p>
+        </p:txBody>
+      </p:sp>
+      <p:sp>
+        <p:nvSpPr>
+          <p:cNvPr id="1116" name="テキスト ボックス 1116"/>
+          <p:cNvSpPr txBox="1"/>
+          <p:nvPr/>
+        </p:nvSpPr>
+        <p:spPr>
+          <a:xfrm>
+            <a:off x="4973955" y="5343525"/>
+            <a:ext cx="6702552" cy="731520"/>
+          </a:xfrm>
+          <a:prstGeom prst="rect">
+            <a:avLst/>
+          </a:prstGeom>
+          <a:noFill/>
+        </p:spPr>
+        <p:txBody>
+          <a:bodyPr wrap="square" lIns="0" tIns="0" rIns="0" bIns="0" rtlCol="0" anchor="ctr">
+            <a:noAutofit/>
+          </a:bodyPr>
+          <a:lstStyle/>
+          <a:p>
+            <a:pPr algn="l">
+              <a:lnSpc>
+                <a:spcPct val="118000"/>
+              </a:lnSpc>
+              <a:buNone/>
+            </a:pPr>
+            <a:r>
+              <a:rPr kumimoji="1" lang="ja-JP" altLang="en-US" sz="2800" dirty="0">
+                <a:solidFill>
+                  <a:srgbClr val="17253C"/>
+                </a:solidFill>
+                <a:latin typeface="MS PGothic"/>
+                <a:ea typeface="MS PGothic"/>
+              </a:rPr>
+              <a:t>音が聞こえなくても、図で分かる</a:t>
+            </a:r>
+            <a:endParaRPr lang="ja-JP" altLang="en-US" sz="2800" dirty="0">
+              <a:solidFill>
+                <a:srgbClr val="17253C"/>
+              </a:solidFill>
+              <a:latin typeface="MS PGothic"/>
+              <a:ea typeface="MS PGothic"/>
+            </a:endParaRPr>
           </a:p>
         </p:txBody>
       </p:sp>

--- a/docs/mtg/20261013_研究室MTG.pptx
+++ b/docs/mtg/20261013_研究室MTG.pptx
@@ -2010,19 +2010,19 @@
           <a:p>
             <a:r>
               <a:rPr kumimoji="1" lang="ja-JP" altLang="en-US" sz="1400" dirty="0"/>
-              <a:t>【2枚目／20秒】相談したいこと</a:t>
+              <a:t>【2枚目／20秒】同意書の変更</a:t>
             </a:r>
           </a:p>
           <a:p>
             <a:r>
               <a:rPr kumimoji="1" lang="ja-JP" altLang="en-US" sz="1400" dirty="0"/>
-              <a:t>1つ相談です。同意書の問い合わせ先がまだ決まっていません。</a:t>
+              <a:t>前回決まっていなかった問い合わせ先は、金道先生の名刺の情報をもとに、金道研究室と金道先生の連絡先にしました。保護者用と生徒用で同じです。</a:t>
             </a:r>
           </a:p>
           <a:p>
             <a:r>
               <a:rPr kumimoji="1" lang="ja-JP" altLang="en-US" sz="1400" dirty="0"/>
-              <a:t>候補は金道先生、SP-PSのメンバー、ろう学校の3つです。誰にするのがよいか、ご意見をください。</a:t>
+              <a:t>また、保護者用の同意書で、アンケートは生徒だけが答える形に直しました。</a:t>
             </a:r>
           </a:p>
         </p:txBody>
@@ -4484,7 +4484,7 @@
                 <a:latin typeface="MS PGothic"/>
                 <a:ea typeface="MS PGothic"/>
               </a:rPr>
-              <a:t>相談したいこと</a:t>
+              <a:t>同意書の変更</a:t>
             </a:r>
           </a:p>
         </p:txBody>
@@ -4612,7 +4612,7 @@
                 <a:latin typeface="MS PGothic"/>
                 <a:ea typeface="MS PGothic"/>
               </a:rPr>
-              <a:t>同意書の「問い合わせ先」が、まだ決まっていません</a:t>
+              <a:t>問い合わせ先を、金道先生の名刺の連絡先にした</a:t>
             </a:r>
           </a:p>
         </p:txBody>
@@ -4696,7 +4696,7 @@
                 <a:latin typeface="MS PGothic"/>
                 <a:ea typeface="MS PGothic"/>
               </a:rPr>
-              <a:t>候補</a:t>
+              <a:t>問い合わせ先</a:t>
             </a:r>
           </a:p>
           <a:p>
@@ -4717,7 +4717,7 @@
                 <a:latin typeface="MS PGothic"/>
                 <a:ea typeface="MS PGothic"/>
               </a:rPr>
-              <a:t>金道先生 ／ SP-PSのメンバー ／ ろう学校</a:t>
+              <a:t>金道研究室・金道先生（住所・電話・メール）</a:t>
             </a:r>
           </a:p>
         </p:txBody>
@@ -4801,7 +4801,7 @@
                 <a:latin typeface="MS PGothic"/>
                 <a:ea typeface="MS PGothic"/>
               </a:rPr>
-              <a:t>決めたいこと</a:t>
+              <a:t>アンケート</a:t>
             </a:r>
           </a:p>
           <a:p>
@@ -4822,7 +4822,7 @@
                 <a:latin typeface="MS PGothic"/>
                 <a:ea typeface="MS PGothic"/>
               </a:rPr>
-              <a:t>保護者や生徒が困ったとき、まず誰に連絡するか</a:t>
+              <a:t>保護者の回答をなくし、生徒だけが答える形に</a:t>
             </a:r>
           </a:p>
         </p:txBody>
@@ -4885,7 +4885,7 @@
                 <a:latin typeface="MS PGothic"/>
                 <a:ea typeface="MS PGothic"/>
               </a:rPr>
-              <a:t>誰を問い合わせ先にすべきか、ご意見をください</a:t>
+              <a:t>保護者用・生徒用とも、同じ連絡先にそろえた</a:t>
             </a:r>
           </a:p>
         </p:txBody>

--- a/docs/mtg/20261013_研究室MTG.pptx
+++ b/docs/mtg/20261013_研究室MTG.pptx
@@ -2016,13 +2016,19 @@
           <a:p>
             <a:r>
               <a:rPr kumimoji="1" lang="ja-JP" altLang="en-US" sz="1400" dirty="0"/>
-              <a:t>前回決まっていなかった問い合わせ先は、金道先生の名刺の情報をもとに、金道研究室と金道先生の連絡先にしました。保護者用と生徒用で同じです。</a:t>
+              <a:t>前回まで未定だった同意書の問い合わせ先を、先生の名刺のとおりに変更しました。</a:t>
             </a:r>
           </a:p>
           <a:p>
             <a:r>
               <a:rPr kumimoji="1" lang="ja-JP" altLang="en-US" sz="1400" dirty="0"/>
-              <a:t>また、保護者用の同意書で、アンケートは生徒だけが答える形に直しました。</a:t>
+              <a:t>上が保護者用、下が生徒用で、どちらも同じ内容です。</a:t>
+            </a:r>
+          </a:p>
+          <a:p>
+            <a:r>
+              <a:rPr kumimoji="1" lang="ja-JP" altLang="en-US" sz="1400" dirty="0"/>
+              <a:t>この内容で問題ないか、ご確認をお願いします。</a:t>
             </a:r>
           </a:p>
         </p:txBody>
@@ -2110,19 +2116,19 @@
           <a:p>
             <a:r>
               <a:rPr kumimoji="1" lang="ja-JP" altLang="en-US" sz="1400" dirty="0"/>
-              <a:t>来週は、生徒がひとりでアプリを使えるように、手順書を作ります。</a:t>
+              <a:t>来週は、アプリの手順書を作ります。</a:t>
             </a:r>
           </a:p>
           <a:p>
             <a:r>
               <a:rPr kumimoji="1" lang="ja-JP" altLang="en-US" sz="1400" dirty="0"/>
-              <a:t>対象はろう学校の中学部・高等部の生徒で、録音から結果の見方までを、画面の画像つきで説明します。</a:t>
+              <a:t>生徒向けには録音してから結果を確認するまで、保護者向けにはお手本を録画して登録するまでの流れを、</a:t>
             </a:r>
           </a:p>
           <a:p>
             <a:r>
               <a:rPr kumimoji="1" lang="ja-JP" altLang="en-US" sz="1400" dirty="0"/>
-              <a:t>音が聞こえなくても分かるように、図を中心にします。以上です。</a:t>
+              <a:t>画面の画像つきで1つずつ説明します。以上です。</a:t>
             </a:r>
           </a:p>
         </p:txBody>
@@ -4612,217 +4618,7 @@
                 <a:latin typeface="MS PGothic"/>
                 <a:ea typeface="MS PGothic"/>
               </a:rPr>
-              <a:t>問い合わせ先を、金道先生の名刺の連絡先にした</a:t>
-            </a:r>
-          </a:p>
-        </p:txBody>
-      </p:sp>
-      <p:sp>
-        <p:nvSpPr>
-          <p:cNvPr id="120" name="図形 120"/>
-          <p:cNvSpPr/>
-          <p:nvPr/>
-        </p:nvSpPr>
-        <p:spPr>
-          <a:xfrm>
-            <a:off x="502920" y="2615184"/>
-            <a:ext cx="11183112" cy="1481328"/>
-          </a:xfrm>
-          <a:prstGeom prst="roundRect">
-            <a:avLst>
-              <a:gd name="adj" fmla="val 9876"/>
-            </a:avLst>
-          </a:prstGeom>
-          <a:solidFill>
-            <a:srgbClr val="F5F8FD"/>
-          </a:solidFill>
-          <a:ln w="15875">
-            <a:solidFill>
-              <a:srgbClr val="D5DCE6"/>
-            </a:solidFill>
-          </a:ln>
-          <a:effectLst>
-            <a:outerShdw blurRad="57150" dist="19050" dir="5400000" rotWithShape="0">
-              <a:srgbClr val="16294A">
-                <a:alpha val="13000"/>
-              </a:srgbClr>
-            </a:outerShdw>
-          </a:effectLst>
-        </p:spPr>
-        <p:txBody>
-          <a:bodyPr wrap="square" lIns="109728" tIns="45720" rIns="109728" bIns="45720" rtlCol="0" anchor="ctr">
-            <a:noAutofit/>
-          </a:bodyPr>
-          <a:lstStyle/>
-          <a:p>
-            <a:pPr algn="ctr"/>
-            <a:endParaRPr lang="ja-JP"/>
-          </a:p>
-        </p:txBody>
-      </p:sp>
-      <p:sp>
-        <p:nvSpPr>
-          <p:cNvPr id="121" name="テキスト ボックス 121"/>
-          <p:cNvSpPr txBox="1"/>
-          <p:nvPr/>
-        </p:nvSpPr>
-        <p:spPr>
-          <a:xfrm>
-            <a:off x="832104" y="2743200"/>
-            <a:ext cx="10524744" cy="1225296"/>
-          </a:xfrm>
-          <a:prstGeom prst="rect">
-            <a:avLst/>
-          </a:prstGeom>
-          <a:noFill/>
-        </p:spPr>
-        <p:txBody>
-          <a:bodyPr wrap="square" lIns="0" tIns="0" rIns="0" bIns="0" rtlCol="0" anchor="ctr">
-            <a:noAutofit/>
-          </a:bodyPr>
-          <a:lstStyle/>
-          <a:p>
-            <a:pPr algn="l">
-              <a:lnSpc>
-                <a:spcPct val="110000"/>
-              </a:lnSpc>
-              <a:buNone/>
-            </a:pPr>
-            <a:r>
-              <a:rPr kumimoji="1" lang="ja-JP" altLang="en-US" sz="3000" b="1" dirty="0">
-                <a:solidFill>
-                  <a:srgbClr val="203864"/>
-                </a:solidFill>
-                <a:latin typeface="MS PGothic"/>
-                <a:ea typeface="MS PGothic"/>
-              </a:rPr>
-              <a:t>問い合わせ先</a:t>
-            </a:r>
-          </a:p>
-          <a:p>
-            <a:pPr algn="l">
-              <a:lnSpc>
-                <a:spcPct val="112000"/>
-              </a:lnSpc>
-              <a:spcBef>
-                <a:spcPts val="800"/>
-              </a:spcBef>
-              <a:buNone/>
-            </a:pPr>
-            <a:r>
-              <a:rPr kumimoji="1" lang="ja-JP" altLang="en-US" sz="3000" dirty="0">
-                <a:solidFill>
-                  <a:srgbClr val="17253C"/>
-                </a:solidFill>
-                <a:latin typeface="MS PGothic"/>
-                <a:ea typeface="MS PGothic"/>
-              </a:rPr>
-              <a:t>金道研究室・金道先生（住所・電話・メール）</a:t>
-            </a:r>
-          </a:p>
-        </p:txBody>
-      </p:sp>
-      <p:sp>
-        <p:nvSpPr>
-          <p:cNvPr id="122" name="図形 122"/>
-          <p:cNvSpPr/>
-          <p:nvPr/>
-        </p:nvSpPr>
-        <p:spPr>
-          <a:xfrm>
-            <a:off x="502920" y="4242816"/>
-            <a:ext cx="11183112" cy="1225296"/>
-          </a:xfrm>
-          <a:prstGeom prst="roundRect">
-            <a:avLst>
-              <a:gd name="adj" fmla="val 11940"/>
-            </a:avLst>
-          </a:prstGeom>
-          <a:solidFill>
-            <a:srgbClr val="FFFFFF"/>
-          </a:solidFill>
-          <a:ln w="15875">
-            <a:solidFill>
-              <a:srgbClr val="D5DCE6"/>
-            </a:solidFill>
-          </a:ln>
-          <a:effectLst>
-            <a:outerShdw blurRad="57150" dist="19050" dir="5400000" rotWithShape="0">
-              <a:srgbClr val="16294A">
-                <a:alpha val="13000"/>
-              </a:srgbClr>
-            </a:outerShdw>
-          </a:effectLst>
-        </p:spPr>
-        <p:txBody>
-          <a:bodyPr wrap="square" lIns="109728" tIns="45720" rIns="109728" bIns="45720" rtlCol="0" anchor="ctr">
-            <a:noAutofit/>
-          </a:bodyPr>
-          <a:lstStyle/>
-          <a:p>
-            <a:pPr algn="ctr"/>
-            <a:endParaRPr lang="ja-JP"/>
-          </a:p>
-        </p:txBody>
-      </p:sp>
-      <p:sp>
-        <p:nvSpPr>
-          <p:cNvPr id="123" name="テキスト ボックス 123"/>
-          <p:cNvSpPr txBox="1"/>
-          <p:nvPr/>
-        </p:nvSpPr>
-        <p:spPr>
-          <a:xfrm>
-            <a:off x="832104" y="4370832"/>
-            <a:ext cx="10524744" cy="969264"/>
-          </a:xfrm>
-          <a:prstGeom prst="rect">
-            <a:avLst/>
-          </a:prstGeom>
-          <a:noFill/>
-        </p:spPr>
-        <p:txBody>
-          <a:bodyPr wrap="square" lIns="0" tIns="0" rIns="0" bIns="0" rtlCol="0" anchor="ctr">
-            <a:noAutofit/>
-          </a:bodyPr>
-          <a:lstStyle/>
-          <a:p>
-            <a:pPr algn="l">
-              <a:lnSpc>
-                <a:spcPct val="110000"/>
-              </a:lnSpc>
-              <a:buNone/>
-            </a:pPr>
-            <a:r>
-              <a:rPr kumimoji="1" lang="ja-JP" altLang="en-US" sz="2600" b="1" dirty="0">
-                <a:solidFill>
-                  <a:srgbClr val="203864"/>
-                </a:solidFill>
-                <a:latin typeface="MS PGothic"/>
-                <a:ea typeface="MS PGothic"/>
-              </a:rPr>
-              <a:t>アンケート</a:t>
-            </a:r>
-          </a:p>
-          <a:p>
-            <a:pPr algn="l">
-              <a:lnSpc>
-                <a:spcPct val="112000"/>
-              </a:lnSpc>
-              <a:spcBef>
-                <a:spcPts val="800"/>
-              </a:spcBef>
-              <a:buNone/>
-            </a:pPr>
-            <a:r>
-              <a:rPr kumimoji="1" lang="ja-JP" altLang="en-US" sz="2600" dirty="0">
-                <a:solidFill>
-                  <a:srgbClr val="17253C"/>
-                </a:solidFill>
-                <a:latin typeface="MS PGothic"/>
-                <a:ea typeface="MS PGothic"/>
-              </a:rPr>
-              <a:t>保護者の回答をなくし、生徒だけが答える形に</a:t>
+              <a:t>問い合わせ先を、先生の名刺のとおりに変更しました</a:t>
             </a:r>
           </a:p>
         </p:txBody>
@@ -4885,7 +4681,186 @@
                 <a:latin typeface="MS PGothic"/>
                 <a:ea typeface="MS PGothic"/>
               </a:rPr>
-              <a:t>保護者用・生徒用とも、同じ連絡先にそろえた</a:t>
+              <a:t>この内容で問題ないか、ご確認ください</a:t>
+            </a:r>
+          </a:p>
+        </p:txBody>
+      </p:sp>
+      <p:sp>
+        <p:nvSpPr>
+          <p:cNvPr id="300" name="ラベル 保護者用"/>
+          <p:cNvSpPr/>
+          <p:nvPr/>
+        </p:nvSpPr>
+        <p:spPr>
+          <a:xfrm>
+            <a:off x="502920" y="2655121"/>
+            <a:ext cx="1600000" cy="560000"/>
+          </a:xfrm>
+          <a:prstGeom prst="roundRect">
+            <a:avLst/>
+          </a:prstGeom>
+          <a:solidFill>
+            <a:srgbClr val="203864"/>
+          </a:solidFill>
+          <a:ln>
+            <a:noFill/>
+          </a:ln>
+        </p:spPr>
+        <p:txBody>
+          <a:bodyPr lIns="0" rIns="0" rtlCol="0" anchor="ctr"/>
+          <a:lstStyle/>
+          <a:p>
+            <a:pPr algn="ctr"/>
+            <a:r>
+              <a:rPr lang="ja-JP" altLang="en-US" sz="2200" b="1" dirty="0">
+                <a:solidFill>
+                  <a:srgbClr val="FFFFFF"/>
+                </a:solidFill>
+                <a:latin typeface="MS PGothic"/>
+                <a:ea typeface="MS PGothic"/>
+              </a:rPr>
+              <a:t>保護者用</a:t>
+            </a:r>
+          </a:p>
+        </p:txBody>
+      </p:sp>
+      <p:pic>
+        <p:nvPicPr>
+          <p:cNvPr id="301" name="同意書の問い合わせ先（保護者用）" descr="変更後の保護者用同意書の問い合わせ先欄"/>
+          <p:cNvPicPr>
+            <a:picLocks noChangeAspect="1"/>
+          </p:cNvPicPr>
+          <p:nvPr/>
+        </p:nvPicPr>
+        <p:blipFill>
+          <a:blip r:embed="rId3"/>
+          <a:stretch>
+            <a:fillRect/>
+          </a:stretch>
+        </p:blipFill>
+        <p:spPr>
+          <a:xfrm>
+            <a:off x="2300000" y="2470000"/>
+            <a:ext cx="9400000" cy="930242"/>
+          </a:xfrm>
+          <a:prstGeom prst="rect">
+            <a:avLst/>
+          </a:prstGeom>
+          <a:ln w="9525">
+            <a:solidFill>
+              <a:srgbClr val="D5DCE6"/>
+            </a:solidFill>
+          </a:ln>
+        </p:spPr>
+      </p:pic>
+      <p:sp>
+        <p:nvSpPr>
+          <p:cNvPr id="302" name="ラベル 生徒用"/>
+          <p:cNvSpPr/>
+          <p:nvPr/>
+        </p:nvSpPr>
+        <p:spPr>
+          <a:xfrm>
+            <a:off x="502920" y="3841543"/>
+            <a:ext cx="1600000" cy="560000"/>
+          </a:xfrm>
+          <a:prstGeom prst="roundRect">
+            <a:avLst/>
+          </a:prstGeom>
+          <a:solidFill>
+            <a:srgbClr val="203864"/>
+          </a:solidFill>
+          <a:ln>
+            <a:noFill/>
+          </a:ln>
+        </p:spPr>
+        <p:txBody>
+          <a:bodyPr lIns="0" rIns="0" rtlCol="0" anchor="ctr"/>
+          <a:lstStyle/>
+          <a:p>
+            <a:pPr algn="ctr"/>
+            <a:r>
+              <a:rPr lang="ja-JP" altLang="en-US" sz="2200" b="1" dirty="0">
+                <a:solidFill>
+                  <a:srgbClr val="FFFFFF"/>
+                </a:solidFill>
+                <a:latin typeface="MS PGothic"/>
+                <a:ea typeface="MS PGothic"/>
+              </a:rPr>
+              <a:t>生徒用</a:t>
+            </a:r>
+          </a:p>
+        </p:txBody>
+      </p:sp>
+      <p:pic>
+        <p:nvPicPr>
+          <p:cNvPr id="303" name="同意書の問い合わせ先（生徒用）" descr="変更後の生徒用同意書の問い合わせ先欄"/>
+          <p:cNvPicPr>
+            <a:picLocks noChangeAspect="1"/>
+          </p:cNvPicPr>
+          <p:nvPr/>
+        </p:nvPicPr>
+        <p:blipFill>
+          <a:blip r:embed="rId4"/>
+          <a:stretch>
+            <a:fillRect/>
+          </a:stretch>
+        </p:blipFill>
+        <p:spPr>
+          <a:xfrm>
+            <a:off x="2300000" y="3640000"/>
+            <a:ext cx="9400000" cy="963087"/>
+          </a:xfrm>
+          <a:prstGeom prst="rect">
+            <a:avLst/>
+          </a:prstGeom>
+          <a:ln w="9525">
+            <a:solidFill>
+              <a:srgbClr val="D5DCE6"/>
+            </a:solidFill>
+          </a:ln>
+        </p:spPr>
+      </p:pic>
+      <p:sp>
+        <p:nvSpPr>
+          <p:cNvPr id="304" name="変更前"/>
+          <p:cNvSpPr txBox="1"/>
+          <p:nvPr/>
+        </p:nvSpPr>
+        <p:spPr>
+          <a:xfrm>
+            <a:off x="502920" y="4780000"/>
+            <a:ext cx="11200000" cy="520000"/>
+          </a:xfrm>
+          <a:prstGeom prst="rect">
+            <a:avLst/>
+          </a:prstGeom>
+          <a:noFill/>
+        </p:spPr>
+        <p:txBody>
+          <a:bodyPr wrap="square" lIns="0" rIns="0" rtlCol="0" anchor="ctr"/>
+          <a:lstStyle/>
+          <a:p>
+            <a:r>
+              <a:rPr lang="ja-JP" altLang="en-US" sz="2000" b="1" dirty="0">
+                <a:solidFill>
+                  <a:srgbClr val="6B7C96"/>
+                </a:solidFill>
+                <a:latin typeface="MS PGothic"/>
+                <a:ea typeface="MS PGothic"/>
+              </a:rPr>
+              <a:t>変更前：</a:t>
+            </a:r>
+            <a:r>
+              <a:rPr lang="ja-JP" altLang="en-US" sz="2000" dirty="0">
+                <a:solidFill>
+                  <a:srgbClr val="5A6472"/>
+                </a:solidFill>
+                <a:latin typeface="MS PGothic"/>
+                <a:ea typeface="MS PGothic"/>
+              </a:rPr>
+              <a:t>「金道先生？ SP-PSのメンバー？ ろう学校？」のまま未定</a:t>
             </a:r>
           </a:p>
         </p:txBody>
@@ -5111,7 +5086,7 @@
                 <a:latin typeface="MS PGothic"/>
                 <a:ea typeface="MS PGothic"/>
               </a:rPr>
-              <a:t>生徒がひとりで使えるように、手順書を作る</a:t>
+              <a:t>生徒と保護者が迷わず使えるように、手順書を作る</a:t>
             </a:r>
           </a:p>
         </p:txBody>
@@ -5156,7 +5131,7 @@
                 <a:latin typeface="MS PGothic"/>
                 <a:ea typeface="MS PGothic"/>
               </a:rPr>
-              <a:t>対象</a:t>
+              <a:t>生徒</a:t>
             </a:r>
           </a:p>
         </p:txBody>
@@ -5197,7 +5172,7 @@
                 <a:latin typeface="MS PGothic"/>
                 <a:ea typeface="MS PGothic"/>
               </a:rPr>
-              <a:t>ろう学校の中学部・高等部の生徒</a:t>
+              <a:t>録音してから、結果を確認するまで</a:t>
             </a:r>
             <a:endParaRPr lang="ja-JP" altLang="en-US" sz="2800" dirty="0">
               <a:solidFill>
@@ -5249,17 +5224,7 @@
                 <a:latin typeface="MS PGothic"/>
                 <a:ea typeface="MS PGothic"/>
               </a:rPr>
-              <a:t>中身</a:t>
-            </a:r>
-            <a:r>
-              <a:rPr lang="ja-JP" altLang="en-US" sz="2400" b="1">
-                <a:solidFill>
-                  <a:srgbClr val="FFFFFF"/>
-                </a:solidFill>
-                <a:latin typeface="MS PGothic"/>
-                <a:ea typeface="MS PGothic"/>
-              </a:rPr>
-              <a:t/>
+              <a:t>保護者</a:t>
             </a:r>
             <a:endParaRPr kumimoji="1" lang="ja-JP" altLang="en-US" sz="2400" b="1" dirty="0">
               <a:solidFill>
@@ -5301,37 +5266,7 @@
                 <a:latin typeface="MS PGothic"/>
                 <a:ea typeface="MS PGothic"/>
               </a:rPr>
-              <a:t>録音から結果の見方まで、画面つき</a:t>
-            </a:r>
-            <a:r>
-              <a:rPr kumimoji="1" lang="ja-JP" sz="2800">
-                <a:solidFill>
-                  <a:srgbClr val="17253C"/>
-                </a:solidFill>
-                <a:latin typeface="MS PGothic"/>
-                <a:ea typeface="MS PGothic"/>
-              </a:rPr>
-              <a:t/>
-            </a:r>
-            <a:r>
-              <a:rPr lang="ja-JP" sz="2800">
-                <a:solidFill>
-                  <a:srgbClr val="17253C"/>
-                </a:solidFill>
-                <a:latin typeface="MS PGothic"/>
-                <a:ea typeface="MS PGothic"/>
-              </a:rPr>
-              <a:t/>
-            </a:r>
-            <a:r>
-              <a:rPr kumimoji="1" lang="ja-JP" sz="2800">
-                <a:solidFill>
-                  <a:srgbClr val="17253C"/>
-                </a:solidFill>
-                <a:latin typeface="MS PGothic"/>
-                <a:ea typeface="MS PGothic"/>
-              </a:rPr>
-              <a:t/>
+              <a:t>お手本を録画して、登録するまで</a:t>
             </a:r>
             <a:endParaRPr lang="ja-JP" sz="2800">
               <a:solidFill>
@@ -5424,7 +5359,7 @@
                 <a:latin typeface="MS PGothic"/>
                 <a:ea typeface="MS PGothic"/>
               </a:rPr>
-              <a:t>音が聞こえなくても、図で分かる</a:t>
+              <a:t>画面の画像つきで、1つずつ順番に</a:t>
             </a:r>
             <a:endParaRPr lang="ja-JP" altLang="en-US" sz="2800" dirty="0">
               <a:solidFill>
